--- a/Becoming-AI-Native-Team-Training.pptx
+++ b/Becoming-AI-Native-Team-Training.pptx
@@ -2057,6 +2057,10 @@
             <a:prstDash val="solid"/>
           </a:ln>
         </p:spPr>
+        <p:txBody>
+          <a:bodyPr/>
+          <a:p/>
+        </p:txBody>
       </p:sp>
       <p:sp>
         <p:nvSpPr>
@@ -2298,6 +2302,10 @@
             <a:prstDash val="solid"/>
           </a:ln>
         </p:spPr>
+        <p:txBody>
+          <a:bodyPr/>
+          <a:p/>
+        </p:txBody>
       </p:sp>
       <p:sp>
         <p:nvSpPr>
@@ -2823,6 +2831,10 @@
             <a:prstDash val="solid"/>
           </a:ln>
         </p:spPr>
+        <p:txBody>
+          <a:bodyPr/>
+          <a:p/>
+        </p:txBody>
       </p:sp>
       <p:sp>
         <p:nvSpPr>
@@ -3071,6 +3083,10 @@
             <a:prstDash val="solid"/>
           </a:ln>
         </p:spPr>
+        <p:txBody>
+          <a:bodyPr/>
+          <a:p/>
+        </p:txBody>
       </p:sp>
       <p:sp>
         <p:nvSpPr>
@@ -3096,6 +3112,10 @@
             <a:prstDash val="solid"/>
           </a:ln>
         </p:spPr>
+        <p:txBody>
+          <a:bodyPr/>
+          <a:p/>
+        </p:txBody>
       </p:sp>
       <p:sp>
         <p:nvSpPr>
@@ -3266,6 +3286,10 @@
             <a:prstDash val="solid"/>
           </a:ln>
         </p:spPr>
+        <p:txBody>
+          <a:bodyPr/>
+          <a:p/>
+        </p:txBody>
       </p:sp>
       <p:sp>
         <p:nvSpPr>
@@ -3479,6 +3503,10 @@
             <a:prstDash val="solid"/>
           </a:ln>
         </p:spPr>
+        <p:txBody>
+          <a:bodyPr/>
+          <a:p/>
+        </p:txBody>
       </p:sp>
       <p:sp>
         <p:nvSpPr>
@@ -3504,6 +3532,10 @@
             <a:prstDash val="solid"/>
           </a:ln>
         </p:spPr>
+        <p:txBody>
+          <a:bodyPr/>
+          <a:p/>
+        </p:txBody>
       </p:sp>
       <p:sp>
         <p:nvSpPr>
@@ -3616,7 +3648,7 @@
                 <a:ea typeface="Calibri" pitchFamily="34" charset="-122"/>
                 <a:cs typeface="Calibri" pitchFamily="34" charset="-120"/>
               </a:rPr>
-              <a:t>Open an Issue with a template. Labels. Evidence.</a:t>
+              <a:t>Open an Issue with a template. No labels needed — unlabeled = untriaged.</a:t>
             </a:r>
             <a:endParaRPr lang="en-US" sz="1200" dirty="0"/>
           </a:p>
@@ -3646,6 +3678,10 @@
             <a:prstDash val="solid"/>
           </a:ln>
         </p:spPr>
+        <p:txBody>
+          <a:bodyPr/>
+          <a:p/>
+        </p:txBody>
       </p:sp>
       <p:sp>
         <p:nvSpPr>
@@ -3671,6 +3707,10 @@
             <a:prstDash val="solid"/>
           </a:ln>
         </p:spPr>
+        <p:txBody>
+          <a:bodyPr/>
+          <a:p/>
+        </p:txBody>
       </p:sp>
       <p:sp>
         <p:nvSpPr>
@@ -3783,7 +3823,7 @@
                 <a:ea typeface="Calibri" pitchFamily="34" charset="-122"/>
                 <a:cs typeface="Calibri" pitchFamily="34" charset="-120"/>
               </a:rPr>
-              <a:t>Maintainer assigns owner, sets priority, moves to Investigating.</a:t>
+              <a:t>Maintainer adds category label, assigns owner, moves to Investigating.</a:t>
             </a:r>
             <a:endParaRPr lang="en-US" sz="1200" dirty="0"/>
           </a:p>
@@ -3813,6 +3853,10 @@
             <a:prstDash val="solid"/>
           </a:ln>
         </p:spPr>
+        <p:txBody>
+          <a:bodyPr/>
+          <a:p/>
+        </p:txBody>
       </p:sp>
       <p:sp>
         <p:nvSpPr>
@@ -3838,6 +3882,10 @@
             <a:prstDash val="solid"/>
           </a:ln>
         </p:spPr>
+        <p:txBody>
+          <a:bodyPr/>
+          <a:p/>
+        </p:txBody>
       </p:sp>
       <p:sp>
         <p:nvSpPr>
@@ -3980,6 +4028,10 @@
             <a:prstDash val="solid"/>
           </a:ln>
         </p:spPr>
+        <p:txBody>
+          <a:bodyPr/>
+          <a:p/>
+        </p:txBody>
       </p:sp>
       <p:sp>
         <p:nvSpPr>
@@ -4005,6 +4057,10 @@
             <a:prstDash val="solid"/>
           </a:ln>
         </p:spPr>
+        <p:txBody>
+          <a:bodyPr/>
+          <a:p/>
+        </p:txBody>
       </p:sp>
       <p:sp>
         <p:nvSpPr>
@@ -4147,6 +4203,10 @@
             <a:prstDash val="solid"/>
           </a:ln>
         </p:spPr>
+        <p:txBody>
+          <a:bodyPr/>
+          <a:p/>
+        </p:txBody>
       </p:sp>
       <p:sp>
         <p:nvSpPr>
@@ -4172,6 +4232,10 @@
             <a:prstDash val="solid"/>
           </a:ln>
         </p:spPr>
+        <p:txBody>
+          <a:bodyPr/>
+          <a:p/>
+        </p:txBody>
       </p:sp>
       <p:sp>
         <p:nvSpPr>
@@ -4353,6 +4417,10 @@
             <a:prstDash val="solid"/>
           </a:ln>
         </p:spPr>
+        <p:txBody>
+          <a:bodyPr/>
+          <a:p/>
+        </p:txBody>
       </p:sp>
       <p:sp>
         <p:nvSpPr>
@@ -4488,6 +4556,10 @@
             <a:prstDash val="solid"/>
           </a:ln>
         </p:spPr>
+        <p:txBody>
+          <a:bodyPr/>
+          <a:p/>
+        </p:txBody>
       </p:sp>
       <p:sp>
         <p:nvSpPr>
@@ -4818,6 +4890,10 @@
             <a:prstDash val="solid"/>
           </a:ln>
         </p:spPr>
+        <p:txBody>
+          <a:bodyPr/>
+          <a:p/>
+        </p:txBody>
       </p:sp>
       <p:sp>
         <p:nvSpPr>
@@ -4843,6 +4919,10 @@
             <a:prstDash val="solid"/>
           </a:ln>
         </p:spPr>
+        <p:txBody>
+          <a:bodyPr/>
+          <a:p/>
+        </p:txBody>
       </p:sp>
       <p:sp>
         <p:nvSpPr>
@@ -4916,7 +4996,7 @@
                 <a:ea typeface="Consolas" pitchFamily="34" charset="-122"/>
                 <a:cs typeface="Consolas" pitchFamily="34" charset="-120"/>
               </a:rPr>
-              <a:t>Labels: </a:t>
+              <a:t>Labels added on triage: mcp  cost  investigating</a:t>
             </a:r>
             <a:pPr indent="0" marL="0">
               <a:buNone/>
@@ -4930,7 +5010,7 @@
                 <a:ea typeface="Consolas" pitchFamily="34" charset="-122"/>
                 <a:cs typeface="Consolas" pitchFamily="34" charset="-120"/>
               </a:rPr>
-              <a:t>problem  mcp  cost  p1</a:t>
+              <a:t/>
             </a:r>
             <a:endParaRPr lang="en-US" sz="1100" dirty="0"/>
           </a:p>
@@ -5147,6 +5227,10 @@
             <a:prstDash val="solid"/>
           </a:ln>
         </p:spPr>
+        <p:txBody>
+          <a:bodyPr/>
+          <a:p/>
+        </p:txBody>
       </p:sp>
       <p:sp>
         <p:nvSpPr>
@@ -5376,6 +5460,10 @@
             <a:prstDash val="solid"/>
           </a:ln>
         </p:spPr>
+        <p:txBody>
+          <a:bodyPr/>
+          <a:p/>
+        </p:txBody>
       </p:sp>
       <p:sp>
         <p:nvSpPr>
@@ -5401,6 +5489,10 @@
             <a:prstDash val="solid"/>
           </a:ln>
         </p:spPr>
+        <p:txBody>
+          <a:bodyPr/>
+          <a:p/>
+        </p:txBody>
       </p:sp>
       <p:sp>
         <p:nvSpPr>
@@ -5571,6 +5663,10 @@
             <a:prstDash val="solid"/>
           </a:ln>
         </p:spPr>
+        <p:txBody>
+          <a:bodyPr/>
+          <a:p/>
+        </p:txBody>
       </p:sp>
       <p:sp>
         <p:nvSpPr>
@@ -5784,6 +5880,10 @@
             <a:prstDash val="solid"/>
           </a:ln>
         </p:spPr>
+        <p:txBody>
+          <a:bodyPr/>
+          <a:p/>
+        </p:txBody>
       </p:sp>
       <p:sp>
         <p:nvSpPr>
@@ -5809,6 +5909,10 @@
             <a:prstDash val="solid"/>
           </a:ln>
         </p:spPr>
+        <p:txBody>
+          <a:bodyPr/>
+          <a:p/>
+        </p:txBody>
       </p:sp>
       <p:sp>
         <p:nvSpPr>
@@ -6055,6 +6159,10 @@
             <a:prstDash val="solid"/>
           </a:ln>
         </p:spPr>
+        <p:txBody>
+          <a:bodyPr/>
+          <a:p/>
+        </p:txBody>
       </p:sp>
       <p:sp>
         <p:nvSpPr>
@@ -6080,6 +6188,10 @@
             <a:prstDash val="solid"/>
           </a:ln>
         </p:spPr>
+        <p:txBody>
+          <a:bodyPr/>
+          <a:p/>
+        </p:txBody>
       </p:sp>
       <p:sp>
         <p:nvSpPr>
@@ -6422,6 +6534,10 @@
             <a:prstDash val="solid"/>
           </a:ln>
         </p:spPr>
+        <p:txBody>
+          <a:bodyPr/>
+          <a:p/>
+        </p:txBody>
       </p:sp>
       <p:sp>
         <p:nvSpPr>
@@ -6674,6 +6790,10 @@
             <a:prstDash val="solid"/>
           </a:ln>
         </p:spPr>
+        <p:txBody>
+          <a:bodyPr/>
+          <a:p/>
+        </p:txBody>
       </p:sp>
       <p:sp>
         <p:nvSpPr>
@@ -6699,6 +6819,10 @@
             <a:prstDash val="solid"/>
           </a:ln>
         </p:spPr>
+        <p:txBody>
+          <a:bodyPr/>
+          <a:p/>
+        </p:txBody>
       </p:sp>
       <p:sp>
         <p:nvSpPr>
@@ -6960,6 +7084,10 @@
             <a:prstDash val="solid"/>
           </a:ln>
         </p:spPr>
+        <p:txBody>
+          <a:bodyPr/>
+          <a:p/>
+        </p:txBody>
       </p:sp>
       <p:sp>
         <p:nvSpPr>
@@ -6985,6 +7113,10 @@
             <a:prstDash val="solid"/>
           </a:ln>
         </p:spPr>
+        <p:txBody>
+          <a:bodyPr/>
+          <a:p/>
+        </p:txBody>
       </p:sp>
       <p:sp>
         <p:nvSpPr>
@@ -7276,6 +7408,10 @@
             <a:prstDash val="solid"/>
           </a:ln>
         </p:spPr>
+        <p:txBody>
+          <a:bodyPr/>
+          <a:p/>
+        </p:txBody>
       </p:sp>
       <p:sp>
         <p:nvSpPr>
@@ -7489,6 +7625,10 @@
             <a:prstDash val="solid"/>
           </a:ln>
         </p:spPr>
+        <p:txBody>
+          <a:bodyPr/>
+          <a:p/>
+        </p:txBody>
       </p:sp>
       <p:sp>
         <p:nvSpPr>
@@ -7514,6 +7654,10 @@
             <a:prstDash val="solid"/>
           </a:ln>
         </p:spPr>
+        <p:txBody>
+          <a:bodyPr/>
+          <a:p/>
+        </p:txBody>
       </p:sp>
       <p:sp>
         <p:nvSpPr>
@@ -7656,6 +7800,10 @@
             <a:prstDash val="solid"/>
           </a:ln>
         </p:spPr>
+        <p:txBody>
+          <a:bodyPr/>
+          <a:p/>
+        </p:txBody>
       </p:sp>
       <p:sp>
         <p:nvSpPr>
@@ -7681,6 +7829,10 @@
             <a:prstDash val="solid"/>
           </a:ln>
         </p:spPr>
+        <p:txBody>
+          <a:bodyPr/>
+          <a:p/>
+        </p:txBody>
       </p:sp>
       <p:sp>
         <p:nvSpPr>
@@ -7823,6 +7975,10 @@
             <a:prstDash val="solid"/>
           </a:ln>
         </p:spPr>
+        <p:txBody>
+          <a:bodyPr/>
+          <a:p/>
+        </p:txBody>
       </p:sp>
       <p:sp>
         <p:nvSpPr>
@@ -7848,6 +8004,10 @@
             <a:prstDash val="solid"/>
           </a:ln>
         </p:spPr>
+        <p:txBody>
+          <a:bodyPr/>
+          <a:p/>
+        </p:txBody>
       </p:sp>
       <p:sp>
         <p:nvSpPr>
@@ -7990,6 +8150,10 @@
             <a:prstDash val="solid"/>
           </a:ln>
         </p:spPr>
+        <p:txBody>
+          <a:bodyPr/>
+          <a:p/>
+        </p:txBody>
       </p:sp>
       <p:sp>
         <p:nvSpPr>
@@ -8015,6 +8179,10 @@
             <a:prstDash val="solid"/>
           </a:ln>
         </p:spPr>
+        <p:txBody>
+          <a:bodyPr/>
+          <a:p/>
+        </p:txBody>
       </p:sp>
       <p:sp>
         <p:nvSpPr>
@@ -8157,6 +8325,10 @@
             <a:prstDash val="solid"/>
           </a:ln>
         </p:spPr>
+        <p:txBody>
+          <a:bodyPr/>
+          <a:p/>
+        </p:txBody>
       </p:sp>
       <p:sp>
         <p:nvSpPr>
